--- a/Denver/Common-Altitude-2027/decks/06-Team-and-Co-Producer.pptx
+++ b/Denver/Common-Altitude-2027/decks/06-Team-and-Co-Producer.pptx
@@ -524,12 +524,12 @@
           <a:p/>
           <a:p>
             <a:r>
-              <a:t>TEAM + CO-PRODUCER DISCUSSION</a:t>
-            </a:r>
-          </a:p>
-          <a:p>
-            <a:r>
-              <a:t>A demanding creative project deserves a funded team.</a:t>
+              <a:t>TEAM AND CO-PRODUCER DISCUSSION</a:t>
+            </a:r>
+          </a:p>
+          <a:p>
+            <a:r>
+              <a:t>Paid scopes, roles and delivery requirements.</a:t>
             </a:r>
           </a:p>
           <a:p/>
@@ -537,7 +537,7 @@
           <a:p/>
           <a:p>
             <a:r>
-              <a:t>Status: working proposal; site/date/partners/funding/capacities unconfirmed. No external action is authorized by the deck.</a:t>
+              <a:t>Status: working proposal. Site, dates, partners, funding and capacity need confirmation. The deck grants no external-action authority.</a:t>
             </a:r>
           </a:p>
           <a:p>
@@ -627,13 +627,13 @@
           </a:p>
           <a:p>
             <a:r>
-              <a:t>A week designed for different needs.</a:t>
+              <a:t>Preview, public days and close</a:t>
             </a:r>
           </a:p>
           <a:p/>
           <a:p>
             <a:r>
-              <a:t>Proposed August 9–15, 2027, with preparation/restoration separately funded.</a:t>
+              <a:t>The proposed week runs August 9–15, 2027. Budget preparation and restoration separately.</a:t>
             </a:r>
           </a:p>
           <a:p/>
@@ -655,7 +655,7 @@
           <a:p/>
           <a:p>
             <a:r>
-              <a:t>Status: working proposal; site/date/partners/funding/capacities unconfirmed. No external action is authorized by the deck.</a:t>
+              <a:t>Status: working proposal. Site, dates, partners, funding and capacity need confirmation. The deck grants no external-action authority.</a:t>
             </a:r>
           </a:p>
           <a:p>
@@ -745,13 +745,13 @@
           </a:p>
           <a:p>
             <a:r>
-              <a:t>Scope the role you can truly own.</a:t>
+              <a:t>Role and capacity discussion</a:t>
             </a:r>
           </a:p>
           <a:p/>
           <a:p>
             <a:r>
-              <a:t>Next step: an authorized paid-discovery conversation about competence, availability, cost, authority and risk.</a:t>
+              <a:t>A paid discovery scope would define competence, availability, cost, authority and risk.</a:t>
             </a:r>
           </a:p>
           <a:p/>
@@ -773,7 +773,7 @@
           <a:p/>
           <a:p>
             <a:r>
-              <a:t>Status: working proposal; site/date/partners/funding/capacities unconfirmed. No external action is authorized by the deck.</a:t>
+              <a:t>Status: working proposal. Site, dates, partners, funding and capacity need confirmation. The deck grants no external-action authority.</a:t>
             </a:r>
           </a:p>
           <a:p>
@@ -863,13 +863,13 @@
           </a:p>
           <a:p>
             <a:r>
-              <a:t>Evidence and terms remain visible.</a:t>
+              <a:t>Planning records and role agreements</a:t>
             </a:r>
           </a:p>
           <a:p/>
           <a:p>
             <a:r>
-              <a:t>The plan includes 365 daily records, 53 weekly records, model inputs and program/rights/operations drafts.</a:t>
+              <a:t>The package includes 365 daily actions, 53 weekly records and finance, program and operating documents.</a:t>
             </a:r>
           </a:p>
           <a:p/>
@@ -880,7 +880,7 @@
           </a:p>
           <a:p>
             <a:r>
-              <a:t>No staffing, fee, equity or profit-share agreement is made by this deck.</a:t>
+              <a:t>This deck creates no staffing, fee, equity or profit-share agreement.</a:t>
             </a:r>
           </a:p>
           <a:p>
@@ -891,7 +891,7 @@
           <a:p/>
           <a:p>
             <a:r>
-              <a:t>Status: working proposal; site/date/partners/funding/capacities unconfirmed. No external action is authorized by the deck.</a:t>
+              <a:t>Status: working proposal. Site, dates, partners, funding and capacity need confirmation. The deck grants no external-action authority.</a:t>
             </a:r>
           </a:p>
           <a:p>
@@ -981,13 +981,13 @@
           </a:p>
           <a:p>
             <a:r>
-              <a:t>The founding functions.</a:t>
+              <a:t>Proposed founding functions</a:t>
             </a:r>
           </a:p>
           <a:p/>
           <a:p>
             <a:r>
-              <a:t>Proposed roles—not proof of accepted hours or production capacity.</a:t>
+              <a:t>Hours, fees, availability and authority still need agreement.</a:t>
             </a:r>
           </a:p>
           <a:p/>
@@ -1009,7 +1009,7 @@
           <a:p/>
           <a:p>
             <a:r>
-              <a:t>Status: working proposal; site/date/partners/funding/capacities unconfirmed. No external action is authorized by the deck.</a:t>
+              <a:t>Status: working proposal. Site, dates, partners, funding and capacity need confirmation. The deck grants no external-action authority.</a:t>
             </a:r>
           </a:p>
           <a:p>
@@ -1099,19 +1099,19 @@
           </a:p>
           <a:p>
             <a:r>
-              <a:t>The first essential additions.</a:t>
+              <a:t>First specialist roles</a:t>
             </a:r>
           </a:p>
           <a:p/>
           <a:p>
             <a:r>
-              <a:t>Competence and actual availability matter more than a celebrity name.</a:t>
+              <a:t>The project needs experienced delivery, collector sales and finance leads.</a:t>
             </a:r>
           </a:p>
           <a:p/>
           <a:p>
             <a:r>
-              <a:t>Executive producer / Comparable complex-venue delivery; authority and stop rights.</a:t>
+              <a:t>Executive producer / Comparable complex-venue delivery. Authority and stop rights.</a:t>
             </a:r>
           </a:p>
           <a:p>
@@ -1127,7 +1127,7 @@
           <a:p/>
           <a:p>
             <a:r>
-              <a:t>Status: working proposal; site/date/partners/funding/capacities unconfirmed. No external action is authorized by the deck.</a:t>
+              <a:t>Status: working proposal. Site, dates, partners, funding and capacity need confirmation. The deck grants no external-action authority.</a:t>
             </a:r>
           </a:p>
           <a:p>
@@ -1217,13 +1217,13 @@
           </a:p>
           <a:p>
             <a:r>
-              <a:t>Pay for defined work. Add upside thoughtfully.</a:t>
+              <a:t>Fees, scope and additional bonuses</a:t>
             </a:r>
           </a:p>
           <a:p/>
           <a:p>
             <a:r>
-              <a:t>The model is funded professional scopes with optional defined performance/profit participation.</a:t>
+              <a:t>Agree funded work first. Define any performance or profit participation separately.</a:t>
             </a:r>
           </a:p>
           <a:p/>
@@ -1245,7 +1245,7 @@
           <a:p/>
           <a:p>
             <a:r>
-              <a:t>Status: working proposal; site/date/partners/funding/capacities unconfirmed. No external action is authorized by the deck.</a:t>
+              <a:t>Status: working proposal. Site, dates, partners, funding and capacity need confirmation. The deck grants no external-action authority.</a:t>
             </a:r>
           </a:p>
           <a:p>
@@ -1335,13 +1335,13 @@
           </a:p>
           <a:p>
             <a:r>
-              <a:t>A bounded discovery stage.</a:t>
+              <a:t>Paid discovery stage</a:t>
             </a:r>
           </a:p>
           <a:p/>
           <a:p>
             <a:r>
-              <a:t>No engagement begins without scope and usable funds.</a:t>
+              <a:t>Begin work only after agreeing the scope and securing usable funds.</a:t>
             </a:r>
           </a:p>
           <a:p/>
@@ -1363,7 +1363,7 @@
           <a:p/>
           <a:p>
             <a:r>
-              <a:t>Status: working proposal; site/date/partners/funding/capacities unconfirmed. No external action is authorized by the deck.</a:t>
+              <a:t>Status: working proposal. Site, dates, partners, funding and capacity need confirmation. The deck grants no external-action authority.</a:t>
             </a:r>
           </a:p>
           <a:p>
@@ -1453,13 +1453,13 @@
           </a:p>
           <a:p>
             <a:r>
-              <a:t>Later core fee envelopes.</a:t>
+              <a:t>Core delivery fee budgets</a:t>
             </a:r>
           </a:p>
           <a:p/>
           <a:p>
             <a:r>
-              <a:t>Scope illustrations, not offers, salaries or unlimited hours.</a:t>
+              <a:t>These proposed amounts need contracts, hours and worker-classification review.</a:t>
             </a:r>
           </a:p>
           <a:p/>
@@ -1481,7 +1481,7 @@
           <a:p/>
           <a:p>
             <a:r>
-              <a:t>Status: working proposal; site/date/partners/funding/capacities unconfirmed. No external action is authorized by the deck.</a:t>
+              <a:t>Status: working proposal. Site, dates, partners, funding and capacity need confirmation. The deck grants no external-action authority.</a:t>
             </a:r>
           </a:p>
           <a:p>
@@ -1571,13 +1571,13 @@
           </a:p>
           <a:p>
             <a:r>
-              <a:t>A complex site, sized to evidence.</a:t>
+              <a:t>Proposed allocation of 60 spaces</a:t>
             </a:r>
           </a:p>
           <a:p/>
           <a:p>
             <a:r>
-              <a:t>Core planning unit: 60 functional spaces, with contained/expanded alternatives.</a:t>
+              <a:t>Site evidence must support the footprint. Smaller and larger options need separate budgets.</a:t>
             </a:r>
           </a:p>
           <a:p/>
@@ -1604,7 +1604,7 @@
           <a:p/>
           <a:p>
             <a:r>
-              <a:t>Status: working proposal; site/date/partners/funding/capacities unconfirmed. No external action is authorized by the deck.</a:t>
+              <a:t>Status: working proposal. Site, dates, partners, funding and capacity need confirmation. The deck grants no external-action authority.</a:t>
             </a:r>
           </a:p>
           <a:p>
@@ -1694,13 +1694,13 @@
           </a:p>
           <a:p>
             <a:r>
-              <a:t>Professional partners to investigate.</a:t>
+              <a:t>Professional candidates</a:t>
             </a:r>
           </a:p>
           <a:p/>
           <a:p>
             <a:r>
-              <a:t>Research candidates only; no appointment or endorsement.</a:t>
+              <a:t>The project has appointed none of these candidates.</a:t>
             </a:r>
           </a:p>
           <a:p/>
@@ -1722,7 +1722,7 @@
           <a:p/>
           <a:p>
             <a:r>
-              <a:t>Status: working proposal; site/date/partners/funding/capacities unconfirmed. No external action is authorized by the deck.</a:t>
+              <a:t>Status: working proposal. Site, dates, partners, funding and capacity need confirmation. The deck grants no external-action authority.</a:t>
             </a:r>
           </a:p>
           <a:p>
@@ -1812,24 +1812,24 @@
           </a:p>
           <a:p>
             <a:r>
-              <a:t>Decisions before irreversible exposure.</a:t>
+              <a:t>Funding and approval sequence</a:t>
             </a:r>
           </a:p>
           <a:p/>
           <a:p>
             <a:r>
-              <a:t>Actual source, cash and site evidence control the calendar.</a:t>
+              <a:t>Site evidence, usable cash and accepted responsibilities control the schedule.</a:t>
             </a:r>
           </a:p>
           <a:p/>
           <a:p>
             <a:r>
-              <a:t>G0–G1 / Fund discovery; establish site feasibility.</a:t>
-            </a:r>
-          </a:p>
-          <a:p>
-            <a:r>
-              <a:t>G2–G3 / Accept delivery roles; prove launch finance/site path.</a:t>
+              <a:t>G0–G1 / Fund discovery. Establish site feasibility.</a:t>
+            </a:r>
+          </a:p>
+          <a:p>
+            <a:r>
+              <a:t>G2–G3 / Accept delivery roles. Prove launch finance/site path.</a:t>
             </a:r>
           </a:p>
           <a:p>
@@ -1845,7 +1845,7 @@
           <a:p/>
           <a:p>
             <a:r>
-              <a:t>Status: working proposal; site/date/partners/funding/capacities unconfirmed. No external action is authorized by the deck.</a:t>
+              <a:t>Status: working proposal. Site, dates, partners, funding and capacity need confirmation. The deck grants no external-action authority.</a:t>
             </a:r>
           </a:p>
           <a:p>
@@ -5026,7 +5026,7 @@
               </a:defRPr>
             </a:pPr>
             <a:r>
-              <a:t>TEAM + CO-PRODUCER DISCUSSION</a:t>
+              <a:t>TEAM AND CO-PRODUCER DISCUSSION</a:t>
             </a:r>
           </a:p>
           <a:p>
@@ -5048,7 +5048,7 @@
               </a:defRPr>
             </a:pPr>
             <a:r>
-              <a:t>A demanding creative project deserves a funded team.</a:t>
+              <a:t>Paid scopes, roles and delivery requirements.</a:t>
             </a:r>
           </a:p>
         </p:txBody>
@@ -5731,7 +5731,7 @@
               </a:defRPr>
             </a:pPr>
             <a:r>
-              <a:t>A week designed for different needs.</a:t>
+              <a:t>Preview, public days and close</a:t>
             </a:r>
           </a:p>
         </p:txBody>
@@ -5776,7 +5776,7 @@
               </a:defRPr>
             </a:pPr>
             <a:r>
-              <a:t>Proposed August 9–15, 2027, with preparation/restoration separately funded.</a:t>
+              <a:t>The proposed week runs August 9–15, 2027. Budget preparation and restoration separately.</a:t>
             </a:r>
           </a:p>
         </p:txBody>
@@ -6664,29 +6664,7 @@
               </a:defRPr>
             </a:pPr>
             <a:r>
-              <a:t>Scope the role you can truly</a:t>
-            </a:r>
-          </a:p>
-          <a:p>
-            <a:pPr>
-              <a:lnSpc>
-                <a:spcPct val="108000"/>
-              </a:lnSpc>
-              <a:spcBef>
-                <a:spcPts val="0"/>
-              </a:spcBef>
-              <a:spcAft>
-                <a:spcPts val="0"/>
-              </a:spcAft>
-              <a:defRPr sz="5200" b="1">
-                <a:solidFill>
-                  <a:srgbClr val="F3F0E9"/>
-                </a:solidFill>
-                <a:latin typeface="Arial"/>
-              </a:defRPr>
-            </a:pPr>
-            <a:r>
-              <a:t>own.</a:t>
+              <a:t>Role and capacity discussion</a:t>
             </a:r>
           </a:p>
         </p:txBody>
@@ -6699,7 +6677,7 @@
         </p:nvSpPr>
         <p:spPr>
           <a:xfrm>
-            <a:off x="914400" y="3250184"/>
+            <a:off x="914400" y="2470912"/>
             <a:ext cx="9601200" cy="1371600"/>
           </a:xfrm>
           <a:prstGeom prst="rect">
@@ -6731,7 +6709,7 @@
               </a:defRPr>
             </a:pPr>
             <a:r>
-              <a:t>Next step: an authorized paid-discovery conversation about competence,</a:t>
+              <a:t>A paid discovery scope would define competence, availability, cost,</a:t>
             </a:r>
           </a:p>
           <a:p>
@@ -6753,7 +6731,7 @@
               </a:defRPr>
             </a:pPr>
             <a:r>
-              <a:t>availability, cost, authority and risk.</a:t>
+              <a:t>authority and risk.</a:t>
             </a:r>
           </a:p>
         </p:txBody>
@@ -6766,7 +6744,7 @@
         </p:nvSpPr>
         <p:spPr>
           <a:xfrm>
-            <a:off x="914400" y="4259580"/>
+            <a:off x="914400" y="4160520"/>
             <a:ext cx="73152" cy="384048"/>
           </a:xfrm>
           <a:prstGeom prst="rect">
@@ -6809,7 +6787,7 @@
         </p:nvSpPr>
         <p:spPr>
           <a:xfrm>
-            <a:off x="1188720" y="4259580"/>
+            <a:off x="1188720" y="4160520"/>
             <a:ext cx="9235440" cy="640080"/>
           </a:xfrm>
           <a:prstGeom prst="rect">
@@ -6854,7 +6832,7 @@
         </p:nvSpPr>
         <p:spPr>
           <a:xfrm>
-            <a:off x="914400" y="4991100"/>
+            <a:off x="914400" y="4892040"/>
             <a:ext cx="73152" cy="384048"/>
           </a:xfrm>
           <a:prstGeom prst="rect">
@@ -6897,7 +6875,7 @@
         </p:nvSpPr>
         <p:spPr>
           <a:xfrm>
-            <a:off x="1188720" y="4991100"/>
+            <a:off x="1188720" y="4892040"/>
             <a:ext cx="9235440" cy="640080"/>
           </a:xfrm>
           <a:prstGeom prst="rect">
@@ -6942,7 +6920,7 @@
         </p:nvSpPr>
         <p:spPr>
           <a:xfrm>
-            <a:off x="914400" y="5722620"/>
+            <a:off x="914400" y="5623560"/>
             <a:ext cx="73152" cy="384048"/>
           </a:xfrm>
           <a:prstGeom prst="rect">
@@ -6985,7 +6963,7 @@
         </p:nvSpPr>
         <p:spPr>
           <a:xfrm>
-            <a:off x="1188720" y="5722620"/>
+            <a:off x="1188720" y="5623560"/>
             <a:ext cx="9235440" cy="640080"/>
           </a:xfrm>
           <a:prstGeom prst="rect">
@@ -7655,7 +7633,7 @@
               </a:defRPr>
             </a:pPr>
             <a:r>
-              <a:t>Evidence and terms remain visible.</a:t>
+              <a:t>Planning records and role agreements</a:t>
             </a:r>
           </a:p>
         </p:txBody>
@@ -7700,7 +7678,7 @@
               </a:defRPr>
             </a:pPr>
             <a:r>
-              <a:t>The plan includes 365 daily records, 53 weekly records, model inputs and program/rights/operations drafts.</a:t>
+              <a:t>The package includes 365 daily actions, 53 weekly records and finance, program and operating documents.</a:t>
             </a:r>
           </a:p>
         </p:txBody>
@@ -7880,7 +7858,7 @@
               </a:defRPr>
             </a:pPr>
             <a:r>
-              <a:t>No staffing, fee, equity or profit-share agreement is made by this deck.</a:t>
+              <a:t>This deck creates no staffing, fee, equity or profit-share agreement.</a:t>
             </a:r>
           </a:p>
         </p:txBody>
@@ -8264,7 +8242,7 @@
               </a:defRPr>
             </a:pPr>
             <a:r>
-              <a:t>The founding functions.</a:t>
+              <a:t>Proposed founding functions</a:t>
             </a:r>
           </a:p>
         </p:txBody>
@@ -8309,7 +8287,7 @@
               </a:defRPr>
             </a:pPr>
             <a:r>
-              <a:t>Proposed roles—not proof of accepted hours or production capacity.</a:t>
+              <a:t>Hours, fees, availability and authority still need agreement.</a:t>
             </a:r>
           </a:p>
         </p:txBody>
@@ -9285,7 +9263,7 @@
               </a:defRPr>
             </a:pPr>
             <a:r>
-              <a:t>The first essential additions.</a:t>
+              <a:t>First specialist roles</a:t>
             </a:r>
           </a:p>
         </p:txBody>
@@ -9330,7 +9308,7 @@
               </a:defRPr>
             </a:pPr>
             <a:r>
-              <a:t>Competence and actual availability matter more than a celebrity name.</a:t>
+              <a:t>The project needs experienced delivery, collector sales and finance leads.</a:t>
             </a:r>
           </a:p>
         </p:txBody>
@@ -9528,7 +9506,7 @@
               </a:defRPr>
             </a:pPr>
             <a:r>
-              <a:t>delivery; authority and stop</a:t>
+              <a:t>delivery. Authority and stop</a:t>
             </a:r>
           </a:p>
           <a:p>
@@ -10284,29 +10262,7 @@
               </a:defRPr>
             </a:pPr>
             <a:r>
-              <a:t>Pay for defined work.</a:t>
-            </a:r>
-          </a:p>
-          <a:p>
-            <a:pPr>
-              <a:lnSpc>
-                <a:spcPct val="108000"/>
-              </a:lnSpc>
-              <a:spcBef>
-                <a:spcPts val="0"/>
-              </a:spcBef>
-              <a:spcAft>
-                <a:spcPts val="0"/>
-              </a:spcAft>
-              <a:defRPr sz="5000" b="1">
-                <a:solidFill>
-                  <a:srgbClr val="151A22"/>
-                </a:solidFill>
-                <a:latin typeface="Arial"/>
-              </a:defRPr>
-            </a:pPr>
-            <a:r>
-              <a:t>Add upside thoughtfully.</a:t>
+              <a:t>Fees, scope and additional bonuses</a:t>
             </a:r>
           </a:p>
         </p:txBody>
@@ -10319,7 +10275,7 @@
         </p:nvSpPr>
         <p:spPr>
           <a:xfrm>
-            <a:off x="914400" y="2585720"/>
+            <a:off x="914400" y="1887220"/>
             <a:ext cx="12618720" cy="1005840"/>
           </a:xfrm>
           <a:prstGeom prst="rect">
@@ -10351,7 +10307,7 @@
               </a:defRPr>
             </a:pPr>
             <a:r>
-              <a:t>The model is funded professional scopes with optional defined performance/profit participation.</a:t>
+              <a:t>Agree funded work first. Define any performance or profit participation separately.</a:t>
             </a:r>
           </a:p>
         </p:txBody>
@@ -10364,7 +10320,7 @@
         </p:nvSpPr>
         <p:spPr>
           <a:xfrm>
-            <a:off x="914400" y="3217926"/>
+            <a:off x="914400" y="2880360"/>
             <a:ext cx="68580" cy="457200"/>
           </a:xfrm>
           <a:prstGeom prst="rect">
@@ -10407,8 +10363,8 @@
         </p:nvSpPr>
         <p:spPr>
           <a:xfrm>
-            <a:off x="1234440" y="3190494"/>
-            <a:ext cx="12252960" cy="1265173"/>
+            <a:off x="1234440" y="2852928"/>
+            <a:ext cx="12252960" cy="1377695"/>
           </a:xfrm>
           <a:prstGeom prst="rect">
             <a:avLst/>
@@ -10452,7 +10408,7 @@
         </p:nvSpPr>
         <p:spPr>
           <a:xfrm>
-            <a:off x="914400" y="4601972"/>
+            <a:off x="914400" y="4376928"/>
             <a:ext cx="68580" cy="457200"/>
           </a:xfrm>
           <a:prstGeom prst="rect">
@@ -10495,8 +10451,8 @@
         </p:nvSpPr>
         <p:spPr>
           <a:xfrm>
-            <a:off x="1234440" y="4574540"/>
-            <a:ext cx="12252960" cy="1265173"/>
+            <a:off x="1234440" y="4349496"/>
+            <a:ext cx="12252960" cy="1377695"/>
           </a:xfrm>
           <a:prstGeom prst="rect">
             <a:avLst/>
@@ -10540,7 +10496,7 @@
         </p:nvSpPr>
         <p:spPr>
           <a:xfrm>
-            <a:off x="914400" y="5986018"/>
+            <a:off x="914400" y="5873496"/>
             <a:ext cx="68580" cy="457200"/>
           </a:xfrm>
           <a:prstGeom prst="rect">
@@ -10583,8 +10539,8 @@
         </p:nvSpPr>
         <p:spPr>
           <a:xfrm>
-            <a:off x="1234440" y="5958586"/>
-            <a:ext cx="12252960" cy="1265173"/>
+            <a:off x="1234440" y="5846063"/>
+            <a:ext cx="12252960" cy="1377695"/>
           </a:xfrm>
           <a:prstGeom prst="rect">
             <a:avLst/>
@@ -10909,7 +10865,7 @@
               </a:defRPr>
             </a:pPr>
             <a:r>
-              <a:t>A bounded discovery stage.</a:t>
+              <a:t>Paid discovery stage</a:t>
             </a:r>
           </a:p>
         </p:txBody>
@@ -10954,7 +10910,7 @@
               </a:defRPr>
             </a:pPr>
             <a:r>
-              <a:t>No engagement begins without scope and usable funds.</a:t>
+              <a:t>Begin work only after agreeing the scope and securing usable funds.</a:t>
             </a:r>
           </a:p>
         </p:txBody>
@@ -11798,7 +11754,7 @@
               </a:defRPr>
             </a:pPr>
             <a:r>
-              <a:t>Later core fee envelopes.</a:t>
+              <a:t>Core delivery fee budgets</a:t>
             </a:r>
           </a:p>
         </p:txBody>
@@ -11843,7 +11799,7 @@
               </a:defRPr>
             </a:pPr>
             <a:r>
-              <a:t>Scope illustrations, not offers, salaries or unlimited hours.</a:t>
+              <a:t>These proposed amounts need contracts, hours and worker-classification review.</a:t>
             </a:r>
           </a:p>
         </p:txBody>
@@ -12665,7 +12621,7 @@
               </a:defRPr>
             </a:pPr>
             <a:r>
-              <a:t>A complex site, sized to evidence.</a:t>
+              <a:t>Proposed allocation of 60 spaces</a:t>
             </a:r>
           </a:p>
         </p:txBody>
@@ -12710,7 +12666,7 @@
               </a:defRPr>
             </a:pPr>
             <a:r>
-              <a:t>Core planning unit: 60 functional spaces, with contained/expanded alternatives.</a:t>
+              <a:t>Site evidence must support the footprint. Smaller and larger options need separate budgets.</a:t>
             </a:r>
           </a:p>
         </p:txBody>
@@ -15695,7 +15651,7 @@
               </a:defRPr>
             </a:pPr>
             <a:r>
-              <a:t>CONCEPTUAL FUNCTION GRID / NOT A SURVEYED FLOOR PLAN</a:t>
+              <a:t>PROPOSED PROGRAM FUNCTIONS / SITE SURVEY PENDING</a:t>
             </a:r>
           </a:p>
         </p:txBody>
@@ -15989,7 +15945,7 @@
               </a:defRPr>
             </a:pPr>
             <a:r>
-              <a:t>Professional partners to investigate.</a:t>
+              <a:t>Professional candidates</a:t>
             </a:r>
           </a:p>
         </p:txBody>
@@ -16034,7 +15990,7 @@
               </a:defRPr>
             </a:pPr>
             <a:r>
-              <a:t>Research candidates only; no appointment or endorsement.</a:t>
+              <a:t>The project has appointed none of these candidates.</a:t>
             </a:r>
           </a:p>
         </p:txBody>
@@ -16922,7 +16878,7 @@
               </a:defRPr>
             </a:pPr>
             <a:r>
-              <a:t>Decisions before irreversible exposure.</a:t>
+              <a:t>Funding and approval sequence</a:t>
             </a:r>
           </a:p>
         </p:txBody>
@@ -16967,7 +16923,7 @@
               </a:defRPr>
             </a:pPr>
             <a:r>
-              <a:t>Actual source, cash and site evidence control the calendar.</a:t>
+              <a:t>Site evidence, usable cash and accepted responsibilities control the schedule.</a:t>
             </a:r>
           </a:p>
         </p:txBody>
@@ -17143,7 +17099,7 @@
               </a:defRPr>
             </a:pPr>
             <a:r>
-              <a:t>Fund discovery;</a:t>
+              <a:t>Fund discovery.</a:t>
             </a:r>
           </a:p>
           <a:p>
@@ -17165,7 +17121,7 @@
               </a:defRPr>
             </a:pPr>
             <a:r>
-              <a:t>establish site</a:t>
+              <a:t>Establish site</a:t>
             </a:r>
           </a:p>
           <a:p>
@@ -17385,7 +17341,7 @@
               </a:defRPr>
             </a:pPr>
             <a:r>
-              <a:t>roles; prove launch</a:t>
+              <a:t>roles. Prove launch</a:t>
             </a:r>
           </a:p>
           <a:p>
